--- a/docs/presentations/00-genuine-homes-overview.pptx
+++ b/docs/presentations/00-genuine-homes-overview.pptx
@@ -3638,7 +3638,7 @@
                           <a:ea typeface="Segoe UI" pitchFamily="34" charset="-122"/>
                           <a:cs typeface="Segoe UI" pitchFamily="34" charset="-120"/>
                         </a:rPr>
-                        <a:t>Next</a:t>
+                        <a:t>Done</a:t>
                       </a:r>
                       <a:endParaRPr lang="en-US" sz="1250" dirty="0">
                         <a:latin typeface="Segoe UI" charset="0"/>
@@ -3844,7 +3844,7 @@
                           <a:ea typeface="Segoe UI" pitchFamily="34" charset="-122"/>
                           <a:cs typeface="Segoe UI" pitchFamily="34" charset="-120"/>
                         </a:rPr>
-                        <a:t>Planned</a:t>
+                        <a:t>Next</a:t>
                       </a:r>
                       <a:endParaRPr lang="en-US" sz="1250" dirty="0">
                         <a:latin typeface="Segoe UI" charset="0"/>

--- a/docs/presentations/00-genuine-homes-overview.pptx
+++ b/docs/presentations/00-genuine-homes-overview.pptx
@@ -3776,7 +3776,7 @@
                           <a:ea typeface="Segoe UI" pitchFamily="34" charset="-122"/>
                           <a:cs typeface="Segoe UI" pitchFamily="34" charset="-120"/>
                         </a:rPr>
-                        <a:t>Installment engine</a:t>
+                        <a:t>Installment engine + web charts</a:t>
                       </a:r>
                       <a:endParaRPr lang="en-US" sz="1250" dirty="0">
                         <a:latin typeface="Segoe UI" charset="0"/>
@@ -3844,7 +3844,7 @@
                           <a:ea typeface="Segoe UI" pitchFamily="34" charset="-122"/>
                           <a:cs typeface="Segoe UI" pitchFamily="34" charset="-120"/>
                         </a:rPr>
-                        <a:t>Next</a:t>
+                        <a:t>Done</a:t>
                       </a:r>
                       <a:endParaRPr lang="en-US" sz="1250" dirty="0">
                         <a:latin typeface="Segoe UI" charset="0"/>
@@ -4050,7 +4050,7 @@
                           <a:ea typeface="Segoe UI" pitchFamily="34" charset="-122"/>
                           <a:cs typeface="Segoe UI" pitchFamily="34" charset="-120"/>
                         </a:rPr>
-                        <a:t>Planned</a:t>
+                        <a:t>Next</a:t>
                       </a:r>
                       <a:endParaRPr lang="en-US" sz="1250" dirty="0">
                         <a:latin typeface="Segoe UI" charset="0"/>
